--- a/Phase 2/Mid Presentation.pptx
+++ b/Phase 2/Mid Presentation.pptx
@@ -115,6 +115,11 @@
       </a:defRPr>
     </a:lvl9pPr>
   </p:defaultTextStyle>
+  <p:extLst>
+    <p:ext uri="{EFAFB233-063F-42B5-8137-9DF3F51BA10A}">
+      <p15:sldGuideLst xmlns:p15="http://schemas.microsoft.com/office/powerpoint/2012/main"/>
+    </p:ext>
+  </p:extLst>
 </p:presentation>
 </file>
 
@@ -267,7 +272,7 @@
           <a:p>
             <a:fld id="{28A23754-DBFC-45CB-ADE8-EAD232D77BA2}" type="datetimeFigureOut">
               <a:rPr lang="en-IL" smtClean="0"/>
-              <a:t>19/04/2025</a:t>
+              <a:t>20/04/2025</a:t>
             </a:fld>
             <a:endParaRPr lang="en-IL"/>
           </a:p>
@@ -467,7 +472,7 @@
           <a:p>
             <a:fld id="{28A23754-DBFC-45CB-ADE8-EAD232D77BA2}" type="datetimeFigureOut">
               <a:rPr lang="en-IL" smtClean="0"/>
-              <a:t>19/04/2025</a:t>
+              <a:t>20/04/2025</a:t>
             </a:fld>
             <a:endParaRPr lang="en-IL"/>
           </a:p>
@@ -677,7 +682,7 @@
           <a:p>
             <a:fld id="{28A23754-DBFC-45CB-ADE8-EAD232D77BA2}" type="datetimeFigureOut">
               <a:rPr lang="en-IL" smtClean="0"/>
-              <a:t>19/04/2025</a:t>
+              <a:t>20/04/2025</a:t>
             </a:fld>
             <a:endParaRPr lang="en-IL"/>
           </a:p>
@@ -877,7 +882,7 @@
           <a:p>
             <a:fld id="{28A23754-DBFC-45CB-ADE8-EAD232D77BA2}" type="datetimeFigureOut">
               <a:rPr lang="en-IL" smtClean="0"/>
-              <a:t>19/04/2025</a:t>
+              <a:t>20/04/2025</a:t>
             </a:fld>
             <a:endParaRPr lang="en-IL"/>
           </a:p>
@@ -1153,7 +1158,7 @@
           <a:p>
             <a:fld id="{28A23754-DBFC-45CB-ADE8-EAD232D77BA2}" type="datetimeFigureOut">
               <a:rPr lang="en-IL" smtClean="0"/>
-              <a:t>19/04/2025</a:t>
+              <a:t>20/04/2025</a:t>
             </a:fld>
             <a:endParaRPr lang="en-IL"/>
           </a:p>
@@ -1421,7 +1426,7 @@
           <a:p>
             <a:fld id="{28A23754-DBFC-45CB-ADE8-EAD232D77BA2}" type="datetimeFigureOut">
               <a:rPr lang="en-IL" smtClean="0"/>
-              <a:t>19/04/2025</a:t>
+              <a:t>20/04/2025</a:t>
             </a:fld>
             <a:endParaRPr lang="en-IL"/>
           </a:p>
@@ -1836,7 +1841,7 @@
           <a:p>
             <a:fld id="{28A23754-DBFC-45CB-ADE8-EAD232D77BA2}" type="datetimeFigureOut">
               <a:rPr lang="en-IL" smtClean="0"/>
-              <a:t>19/04/2025</a:t>
+              <a:t>20/04/2025</a:t>
             </a:fld>
             <a:endParaRPr lang="en-IL"/>
           </a:p>
@@ -1978,7 +1983,7 @@
           <a:p>
             <a:fld id="{28A23754-DBFC-45CB-ADE8-EAD232D77BA2}" type="datetimeFigureOut">
               <a:rPr lang="en-IL" smtClean="0"/>
-              <a:t>19/04/2025</a:t>
+              <a:t>20/04/2025</a:t>
             </a:fld>
             <a:endParaRPr lang="en-IL"/>
           </a:p>
@@ -2091,7 +2096,7 @@
           <a:p>
             <a:fld id="{28A23754-DBFC-45CB-ADE8-EAD232D77BA2}" type="datetimeFigureOut">
               <a:rPr lang="en-IL" smtClean="0"/>
-              <a:t>19/04/2025</a:t>
+              <a:t>20/04/2025</a:t>
             </a:fld>
             <a:endParaRPr lang="en-IL"/>
           </a:p>
@@ -2404,7 +2409,7 @@
           <a:p>
             <a:fld id="{28A23754-DBFC-45CB-ADE8-EAD232D77BA2}" type="datetimeFigureOut">
               <a:rPr lang="en-IL" smtClean="0"/>
-              <a:t>19/04/2025</a:t>
+              <a:t>20/04/2025</a:t>
             </a:fld>
             <a:endParaRPr lang="en-IL"/>
           </a:p>
@@ -2693,7 +2698,7 @@
           <a:p>
             <a:fld id="{28A23754-DBFC-45CB-ADE8-EAD232D77BA2}" type="datetimeFigureOut">
               <a:rPr lang="en-IL" smtClean="0"/>
-              <a:t>19/04/2025</a:t>
+              <a:t>20/04/2025</a:t>
             </a:fld>
             <a:endParaRPr lang="en-IL"/>
           </a:p>
@@ -2936,7 +2941,7 @@
           <a:p>
             <a:fld id="{28A23754-DBFC-45CB-ADE8-EAD232D77BA2}" type="datetimeFigureOut">
               <a:rPr lang="en-IL" smtClean="0"/>
-              <a:t>19/04/2025</a:t>
+              <a:t>20/04/2025</a:t>
             </a:fld>
             <a:endParaRPr lang="en-IL"/>
           </a:p>
@@ -3502,12 +3507,8 @@
           <a:p>
             <a:pPr algn="l"/>
             <a:r>
-              <a:rPr lang="en-IL" sz="4000" dirty="0"/>
-              <a:t>📊</a:t>
-            </a:r>
-            <a:r>
               <a:rPr lang="en-US" sz="3200" dirty="0"/>
-              <a:t> Intermediate Results</a:t>
+              <a:t>Intermediate Results</a:t>
             </a:r>
             <a:endParaRPr lang="en-IL" sz="8800" dirty="0"/>
           </a:p>
@@ -3598,10 +3599,10 @@
       </p:sp>
       <p:pic>
         <p:nvPicPr>
-          <p:cNvPr id="6" name="Picture 5" descr="A black screen with colorful text&#10;&#10;AI-generated content may be incorrect.">
-            <a:extLst>
-              <a:ext uri="{FF2B5EF4-FFF2-40B4-BE49-F238E27FC236}">
-                <a16:creationId xmlns:a16="http://schemas.microsoft.com/office/drawing/2014/main" id="{FF434AC7-16D9-F843-53D7-BF5180A5584E}"/>
+          <p:cNvPr id="5" name="Picture 4">
+            <a:extLst>
+              <a:ext uri="{FF2B5EF4-FFF2-40B4-BE49-F238E27FC236}">
+                <a16:creationId xmlns:a16="http://schemas.microsoft.com/office/drawing/2014/main" id="{B184A8C7-DEF8-CF9A-F491-E4F90548096E}"/>
               </a:ext>
             </a:extLst>
           </p:cNvPr>
@@ -3611,21 +3612,15 @@
           <p:nvPr/>
         </p:nvPicPr>
         <p:blipFill>
-          <a:blip r:embed="rId2">
-            <a:extLst>
-              <a:ext uri="{28A0092B-C50C-407E-A947-70E740481C1C}">
-                <a14:useLocalDpi xmlns:a14="http://schemas.microsoft.com/office/drawing/2010/main" val="0"/>
-              </a:ext>
-            </a:extLst>
-          </a:blip>
+          <a:blip r:embed="rId2"/>
           <a:stretch>
             <a:fillRect/>
           </a:stretch>
         </p:blipFill>
         <p:spPr>
           <a:xfrm>
-            <a:off x="777960" y="2207897"/>
-            <a:ext cx="10702158" cy="1641975"/>
+            <a:off x="680254" y="2282044"/>
+            <a:ext cx="11281529" cy="1469885"/>
           </a:xfrm>
           <a:prstGeom prst="rect">
             <a:avLst/>
@@ -3861,14 +3856,6 @@
           <a:p>
             <a:pPr algn="l"/>
             <a:r>
-              <a:rPr lang="en-IL" sz="4000" dirty="0"/>
-              <a:t>🚀</a:t>
-            </a:r>
-            <a:r>
-              <a:rPr lang="en-US" sz="1100" dirty="0"/>
-              <a:t> </a:t>
-            </a:r>
-            <a:r>
               <a:rPr lang="en-US" sz="4000" dirty="0"/>
               <a:t>What’s Next</a:t>
             </a:r>
@@ -4057,18 +4044,10 @@
         </p:spPr>
         <p:txBody>
           <a:bodyPr>
-            <a:normAutofit fontScale="90000"/>
+            <a:normAutofit/>
           </a:bodyPr>
           <a:lstStyle/>
           <a:p>
-            <a:r>
-              <a:rPr lang="en-IL" sz="4400" dirty="0"/>
-              <a:t>🎯</a:t>
-            </a:r>
-            <a:r>
-              <a:rPr lang="en-US" sz="1050" dirty="0"/>
-              <a:t> </a:t>
-            </a:r>
             <a:r>
               <a:rPr lang="en-US" sz="3600" dirty="0"/>
               <a:t>Project Goals &amp; Main Challenge</a:t>
@@ -4285,12 +4264,8 @@
           <a:lstStyle/>
           <a:p>
             <a:r>
-              <a:rPr lang="en-IL" sz="4000" dirty="0"/>
-              <a:t>🧠</a:t>
-            </a:r>
-            <a:r>
               <a:rPr lang="en-US" sz="3200" dirty="0"/>
-              <a:t> Brief Review of Related Work</a:t>
+              <a:t>Brief Review of Related Work</a:t>
             </a:r>
             <a:endParaRPr lang="en-IL" sz="8800" dirty="0"/>
           </a:p>
@@ -4481,12 +4456,8 @@
           <a:lstStyle/>
           <a:p>
             <a:r>
-              <a:rPr lang="en-IL" sz="4000" dirty="0"/>
-              <a:t>🧠</a:t>
-            </a:r>
-            <a:r>
               <a:rPr lang="en-US" sz="3200" dirty="0"/>
-              <a:t> Brief Review of Related Work</a:t>
+              <a:t>Brief Review of Related Work</a:t>
             </a:r>
             <a:endParaRPr lang="en-IL" sz="8800" dirty="0"/>
           </a:p>
@@ -4669,18 +4640,14 @@
         </p:spPr>
         <p:txBody>
           <a:bodyPr>
-            <a:normAutofit fontScale="90000"/>
+            <a:normAutofit/>
           </a:bodyPr>
           <a:lstStyle/>
           <a:p>
             <a:pPr algn="l"/>
             <a:r>
-              <a:rPr lang="en-IL" sz="4400" dirty="0"/>
-              <a:t>⚙️</a:t>
-            </a:r>
-            <a:r>
               <a:rPr lang="en-US" sz="3200" dirty="0"/>
-              <a:t> Methodology Overview</a:t>
+              <a:t>Methodology Overview</a:t>
             </a:r>
             <a:endParaRPr lang="en-IL" sz="8800" dirty="0"/>
           </a:p>
@@ -4873,12 +4840,8 @@
           <a:p>
             <a:pPr algn="l"/>
             <a:r>
-              <a:rPr lang="en-IL" sz="4000" dirty="0"/>
-              <a:t>🗂️</a:t>
-            </a:r>
-            <a:r>
               <a:rPr lang="en-US" sz="3200" dirty="0"/>
-              <a:t> Dataset</a:t>
+              <a:t>Dataset</a:t>
             </a:r>
             <a:endParaRPr lang="en-IL" sz="8800" dirty="0"/>
           </a:p>
@@ -5164,12 +5127,8 @@
           <a:p>
             <a:pPr algn="l"/>
             <a:r>
-              <a:rPr lang="en-IL" sz="4000" dirty="0"/>
-              <a:t>📊</a:t>
-            </a:r>
-            <a:r>
               <a:rPr lang="en-US" sz="3200" dirty="0"/>
-              <a:t> Intermediate Results</a:t>
+              <a:t>Intermediate Results</a:t>
             </a:r>
             <a:endParaRPr lang="en-IL" sz="8800" dirty="0"/>
           </a:p>
@@ -5350,12 +5309,8 @@
           <a:p>
             <a:pPr algn="l"/>
             <a:r>
-              <a:rPr lang="en-IL" sz="4000" dirty="0"/>
-              <a:t>📊</a:t>
-            </a:r>
-            <a:r>
               <a:rPr lang="en-US" sz="3200" dirty="0"/>
-              <a:t> Intermediate Results</a:t>
+              <a:t>Intermediate Results</a:t>
             </a:r>
             <a:endParaRPr lang="en-IL" sz="8800" dirty="0"/>
           </a:p>
@@ -5521,12 +5476,8 @@
           <a:p>
             <a:pPr algn="l"/>
             <a:r>
-              <a:rPr lang="en-IL" sz="4000"/>
-              <a:t>📊</a:t>
-            </a:r>
-            <a:r>
-              <a:rPr lang="en-US" sz="3200"/>
-              <a:t> Intermediate Results</a:t>
+              <a:rPr lang="en-US" sz="3200" dirty="0"/>
+              <a:t>Intermediate Results</a:t>
             </a:r>
             <a:endParaRPr lang="en-IL" sz="8800" dirty="0"/>
           </a:p>
@@ -5643,10 +5594,10 @@
       </p:sp>
       <p:pic>
         <p:nvPicPr>
-          <p:cNvPr id="11" name="Picture 10" descr="A computer screen with text&#10;&#10;AI-generated content may be incorrect.">
-            <a:extLst>
-              <a:ext uri="{FF2B5EF4-FFF2-40B4-BE49-F238E27FC236}">
-                <a16:creationId xmlns:a16="http://schemas.microsoft.com/office/drawing/2014/main" id="{DBBE074F-CE44-A322-85E3-E791FB7B6575}"/>
+          <p:cNvPr id="18" name="Picture 17">
+            <a:extLst>
+              <a:ext uri="{FF2B5EF4-FFF2-40B4-BE49-F238E27FC236}">
+                <a16:creationId xmlns:a16="http://schemas.microsoft.com/office/drawing/2014/main" id="{578AFDE8-D4B4-FD8D-023E-C78C725FFDE8}"/>
               </a:ext>
             </a:extLst>
           </p:cNvPr>
@@ -5656,43 +5607,7 @@
           <p:nvPr/>
         </p:nvPicPr>
         <p:blipFill>
-          <a:blip r:embed="rId2">
-            <a:extLst>
-              <a:ext uri="{28A0092B-C50C-407E-A947-70E740481C1C}">
-                <a14:useLocalDpi xmlns:a14="http://schemas.microsoft.com/office/drawing/2010/main" val="0"/>
-              </a:ext>
-            </a:extLst>
-          </a:blip>
-          <a:stretch>
-            <a:fillRect/>
-          </a:stretch>
-        </p:blipFill>
-        <p:spPr>
-          <a:xfrm>
-            <a:off x="1018728" y="2043592"/>
-            <a:ext cx="10012176" cy="2231034"/>
-          </a:xfrm>
-          <a:prstGeom prst="rect">
-            <a:avLst/>
-          </a:prstGeom>
-        </p:spPr>
-      </p:pic>
-      <p:pic>
-        <p:nvPicPr>
-          <p:cNvPr id="18" name="Picture 17">
-            <a:extLst>
-              <a:ext uri="{FF2B5EF4-FFF2-40B4-BE49-F238E27FC236}">
-                <a16:creationId xmlns:a16="http://schemas.microsoft.com/office/drawing/2014/main" id="{578AFDE8-D4B4-FD8D-023E-C78C725FFDE8}"/>
-              </a:ext>
-            </a:extLst>
-          </p:cNvPr>
-          <p:cNvPicPr>
-            <a:picLocks noChangeAspect="1"/>
-          </p:cNvPicPr>
-          <p:nvPr/>
-        </p:nvPicPr>
-        <p:blipFill>
-          <a:blip r:embed="rId3"/>
+          <a:blip r:embed="rId2"/>
           <a:stretch>
             <a:fillRect/>
           </a:stretch>
@@ -5748,6 +5663,36 @@
           </a:fontRef>
         </p:style>
       </p:cxnSp>
+      <p:pic>
+        <p:nvPicPr>
+          <p:cNvPr id="5" name="Picture 4">
+            <a:extLst>
+              <a:ext uri="{FF2B5EF4-FFF2-40B4-BE49-F238E27FC236}">
+                <a16:creationId xmlns:a16="http://schemas.microsoft.com/office/drawing/2014/main" id="{EA141D52-5759-03F4-AC96-AFFA712110AA}"/>
+              </a:ext>
+            </a:extLst>
+          </p:cNvPr>
+          <p:cNvPicPr>
+            <a:picLocks noChangeAspect="1"/>
+          </p:cNvPicPr>
+          <p:nvPr/>
+        </p:nvPicPr>
+        <p:blipFill>
+          <a:blip r:embed="rId3"/>
+          <a:stretch>
+            <a:fillRect/>
+          </a:stretch>
+        </p:blipFill>
+        <p:spPr>
+          <a:xfrm>
+            <a:off x="986867" y="2106878"/>
+            <a:ext cx="9498744" cy="2093922"/>
+          </a:xfrm>
+          <a:prstGeom prst="rect">
+            <a:avLst/>
+          </a:prstGeom>
+        </p:spPr>
+      </p:pic>
     </p:spTree>
     <p:extLst>
       <p:ext uri="{BB962C8B-B14F-4D97-AF65-F5344CB8AC3E}">
